--- a/rapports/septembre/Cdiscount_Voyages_Vols_sept2026.pptx
+++ b/rapports/septembre/Cdiscount_Voyages_Vols_sept2026.pptx
@@ -3242,7 +3242,7 @@
                 </a:solidFill>
                 <a:latin typeface="Arial"/>
               </a:rPr>
-              <a:t>Cdiscount Voyages · Vols</a:t>
+              <a:t>Cdiscount Voyages – Vols</a:t>
             </a:r>
           </a:p>
         </p:txBody>
@@ -3682,7 +3682,7 @@
                 </a:solidFill>
                 <a:latin typeface="Arial"/>
               </a:rPr>
-              <a:t>YTD 2 900 897</a:t>
+              <a:t>YTD 10 029 893</a:t>
             </a:r>
           </a:p>
         </p:txBody>
@@ -3947,7 +3947,7 @@
                 </a:solidFill>
                 <a:latin typeface="Arial"/>
               </a:rPr>
-              <a:t>YTD 11 246</a:t>
+              <a:t>YTD 21 694</a:t>
             </a:r>
           </a:p>
         </p:txBody>
@@ -4212,7 +4212,7 @@
                 </a:solidFill>
                 <a:latin typeface="Arial"/>
               </a:rPr>
-              <a:t>YTD 0,39 %</a:t>
+              <a:t>YTD 0,22 %</a:t>
             </a:r>
           </a:p>
         </p:txBody>
@@ -5870,7 +5870,7 @@
                 </a:solidFill>
                 <a:latin typeface="Arial"/>
               </a:rPr>
-              <a:t>MARQUES CITÉES</a:t>
+              <a:t>CATÉGORIES DE PRODUITS</a:t>
             </a:r>
           </a:p>
         </p:txBody>
@@ -5905,7 +5905,7 @@
                 </a:solidFill>
                 <a:latin typeface="Arial"/>
               </a:rPr>
-              <a:t>Part de voix dans les messages utilisateurs</a:t>
+              <a:t>Répartition des requêtes</a:t>
             </a:r>
           </a:p>
         </p:txBody>
@@ -5998,7 +5998,7 @@
         <p:spPr>
           <a:xfrm>
             <a:off x="8296656" y="4389120"/>
-            <a:ext cx="2072640" cy="152400"/>
+            <a:ext cx="2225040" cy="152400"/>
           </a:xfrm>
           <a:prstGeom prst="rect">
             <a:avLst/>
@@ -6019,7 +6019,7 @@
                 </a:solidFill>
                 <a:latin typeface="Arial"/>
               </a:rPr>
-              <a:t>SNCF</a:t>
+              <a:t>Recherche générique</a:t>
             </a:r>
           </a:p>
         </p:txBody>
@@ -6077,7 +6077,7 @@
         <p:spPr>
           <a:xfrm>
             <a:off x="8296656" y="4657344"/>
-            <a:ext cx="2072640" cy="152400"/>
+            <a:ext cx="2225040" cy="152400"/>
           </a:xfrm>
           <a:prstGeom prst="rect">
             <a:avLst/>
@@ -6098,7 +6098,7 @@
                 </a:solidFill>
                 <a:latin typeface="Arial"/>
               </a:rPr>
-              <a:t>easyJet · 15 %</a:t>
+              <a:t>Outre-mer et Caraïbes · 17 %</a:t>
             </a:r>
           </a:p>
         </p:txBody>
@@ -6156,7 +6156,7 @@
         <p:spPr>
           <a:xfrm>
             <a:off x="8296656" y="4925568"/>
-            <a:ext cx="2072640" cy="152400"/>
+            <a:ext cx="2225040" cy="152400"/>
           </a:xfrm>
           <a:prstGeom prst="rect">
             <a:avLst/>
@@ -6177,7 +6177,7 @@
                 </a:solidFill>
                 <a:latin typeface="Arial"/>
               </a:rPr>
-              <a:t>Transavia · 14 %</a:t>
+              <a:t>Europe et city breaks · 20 %</a:t>
             </a:r>
           </a:p>
         </p:txBody>
@@ -6235,7 +6235,7 @@
         <p:spPr>
           <a:xfrm>
             <a:off x="8296656" y="5193792"/>
-            <a:ext cx="2072640" cy="152400"/>
+            <a:ext cx="2225040" cy="152400"/>
           </a:xfrm>
           <a:prstGeom prst="rect">
             <a:avLst/>
@@ -6256,7 +6256,7 @@
                 </a:solidFill>
                 <a:latin typeface="Arial"/>
               </a:rPr>
-              <a:t>Ryanair · 11 %</a:t>
+              <a:t>Afrique du Nord et Afrique · 14 %</a:t>
             </a:r>
           </a:p>
         </p:txBody>
@@ -6314,7 +6314,7 @@
         <p:spPr>
           <a:xfrm>
             <a:off x="8296656" y="5462016"/>
-            <a:ext cx="2072640" cy="152400"/>
+            <a:ext cx="2225040" cy="152400"/>
           </a:xfrm>
           <a:prstGeom prst="rect">
             <a:avLst/>
@@ -6329,13 +6329,13 @@
           <a:p>
             <a:pPr algn="l"/>
             <a:r>
-              <a:rPr sz="1000" b="0" i="0">
+              <a:rPr sz="800" b="0" i="0">
                 <a:solidFill>
                   <a:srgbClr val="111111"/>
                 </a:solidFill>
                 <a:latin typeface="Arial"/>
               </a:rPr>
-              <a:t>Air France · 11 %</a:t>
+              <a:t>Long-courrier international · 11 %</a:t>
             </a:r>
           </a:p>
         </p:txBody>
@@ -6393,7 +6393,7 @@
         <p:spPr>
           <a:xfrm>
             <a:off x="8296656" y="5730240"/>
-            <a:ext cx="2072640" cy="152400"/>
+            <a:ext cx="2225040" cy="152400"/>
           </a:xfrm>
           <a:prstGeom prst="rect">
             <a:avLst/>
@@ -6414,7 +6414,7 @@
                 </a:solidFill>
                 <a:latin typeface="Arial"/>
               </a:rPr>
-              <a:t>Autres (Cdiscount Vols &lt; 0,1 %) · 17 %</a:t>
+              <a:t>France métropolitaine · 4 %</a:t>
             </a:r>
           </a:p>
         </p:txBody>
@@ -6428,7 +6428,7 @@
         <p:spPr>
           <a:xfrm>
             <a:off x="10564368" y="4450080"/>
-            <a:ext cx="475488" cy="429158"/>
+            <a:ext cx="475488" cy="455980"/>
           </a:xfrm>
           <a:prstGeom prst="rect">
             <a:avLst/>
@@ -6472,7 +6472,7 @@
         <p:spPr>
           <a:xfrm>
             <a:off x="10564368" y="4450080"/>
-            <a:ext cx="475488" cy="429158"/>
+            <a:ext cx="475488" cy="455980"/>
           </a:xfrm>
           <a:prstGeom prst="rect">
             <a:avLst/>
@@ -6493,7 +6493,7 @@
                 </a:solidFill>
                 <a:latin typeface="Arial"/>
               </a:rPr>
-              <a:t>32 %</a:t>
+              <a:t>34 %</a:t>
             </a:r>
           </a:p>
         </p:txBody>
@@ -6506,8 +6506,8 @@
         </p:nvSpPr>
         <p:spPr>
           <a:xfrm>
-            <a:off x="10564368" y="4879238"/>
-            <a:ext cx="475488" cy="201168"/>
+            <a:off x="10564368" y="4906060"/>
+            <a:ext cx="475488" cy="227990"/>
           </a:xfrm>
           <a:prstGeom prst="rect">
             <a:avLst/>
@@ -6550,8 +6550,8 @@
         </p:nvSpPr>
         <p:spPr>
           <a:xfrm>
-            <a:off x="10564368" y="5080406"/>
-            <a:ext cx="475488" cy="187756"/>
+            <a:off x="10564368" y="5134051"/>
+            <a:ext cx="475488" cy="268224"/>
           </a:xfrm>
           <a:prstGeom prst="rect">
             <a:avLst/>
@@ -6594,8 +6594,8 @@
         </p:nvSpPr>
         <p:spPr>
           <a:xfrm>
-            <a:off x="10564368" y="5268163"/>
-            <a:ext cx="475488" cy="147523"/>
+            <a:off x="10564368" y="5402275"/>
+            <a:ext cx="475488" cy="187756"/>
           </a:xfrm>
           <a:prstGeom prst="rect">
             <a:avLst/>
@@ -6638,7 +6638,7 @@
         </p:nvSpPr>
         <p:spPr>
           <a:xfrm>
-            <a:off x="10564368" y="5415686"/>
+            <a:off x="10564368" y="5590031"/>
             <a:ext cx="475488" cy="147523"/>
           </a:xfrm>
           <a:prstGeom prst="rect">
@@ -6682,8 +6682,8 @@
         </p:nvSpPr>
         <p:spPr>
           <a:xfrm>
-            <a:off x="10564368" y="5563209"/>
-            <a:ext cx="475488" cy="227990"/>
+            <a:off x="10564368" y="5737555"/>
+            <a:ext cx="475488" cy="53644"/>
           </a:xfrm>
           <a:prstGeom prst="rect">
             <a:avLst/>
@@ -6889,7 +6889,7 @@
                 </a:solidFill>
                 <a:latin typeface="Arial"/>
               </a:rPr>
-              <a:t>Cdiscount Voyages · Vols</a:t>
+              <a:t>Cdiscount Voyages – Vols</a:t>
             </a:r>
           </a:p>
         </p:txBody>
@@ -6968,7 +6968,7 @@
                 </a:solidFill>
                 <a:latin typeface="Arial"/>
               </a:rPr>
-              <a:t>À définir</a:t>
+              <a:t>Atteindre un ROI de 35 pour un CA de 87 k€.</a:t>
             </a:r>
           </a:p>
         </p:txBody>
@@ -7712,7 +7712,7 @@
                 </a:solidFill>
                 <a:latin typeface="Arial"/>
               </a:rPr>
-              <a:t>Aucune conversion n'est remontée par Awin en septembre malgré 9 406 clics.</a:t>
+              <a:t>Aucune conversion n'est remontée par Awin en septembre malgré 9 406 clics, ni depuis le lancement : l'objectif de ROI de 35 ne peut pas être mesuré.</a:t>
             </a:r>
           </a:p>
         </p:txBody>

--- a/rapports/septembre/Cdiscount_Voyages_Vols_sept2026.pptx
+++ b/rapports/septembre/Cdiscount_Voyages_Vols_sept2026.pptx
@@ -6098,7 +6098,7 @@
                 </a:solidFill>
                 <a:latin typeface="Arial"/>
               </a:rPr>
-              <a:t>Outre-mer et Caraïbes · 17 %</a:t>
+              <a:t>Outre-mer et Caraïbes · 8 %</a:t>
             </a:r>
           </a:p>
         </p:txBody>
@@ -6177,7 +6177,7 @@
                 </a:solidFill>
                 <a:latin typeface="Arial"/>
               </a:rPr>
-              <a:t>Europe et city breaks · 20 %</a:t>
+              <a:t>Europe et city breaks · 8 %</a:t>
             </a:r>
           </a:p>
         </p:txBody>
@@ -6256,7 +6256,7 @@
                 </a:solidFill>
                 <a:latin typeface="Arial"/>
               </a:rPr>
-              <a:t>Afrique du Nord et Afrique · 14 %</a:t>
+              <a:t>Afrique du Nord et Afrique · 25 %</a:t>
             </a:r>
           </a:p>
         </p:txBody>
@@ -6335,7 +6335,7 @@
                 </a:solidFill>
                 <a:latin typeface="Arial"/>
               </a:rPr>
-              <a:t>Long-courrier international · 11 %</a:t>
+              <a:t>Long-courrier international · 33 %</a:t>
             </a:r>
           </a:p>
         </p:txBody>
@@ -6414,7 +6414,7 @@
                 </a:solidFill>
                 <a:latin typeface="Arial"/>
               </a:rPr>
-              <a:t>France métropolitaine · 4 %</a:t>
+              <a:t>France métropolitaine · &lt; 1 %</a:t>
             </a:r>
           </a:p>
         </p:txBody>
@@ -6428,7 +6428,7 @@
         <p:spPr>
           <a:xfrm>
             <a:off x="10564368" y="4450080"/>
-            <a:ext cx="475488" cy="455980"/>
+            <a:ext cx="475488" cy="348691"/>
           </a:xfrm>
           <a:prstGeom prst="rect">
             <a:avLst/>
@@ -6472,7 +6472,7 @@
         <p:spPr>
           <a:xfrm>
             <a:off x="10564368" y="4450080"/>
-            <a:ext cx="475488" cy="455980"/>
+            <a:ext cx="475488" cy="348691"/>
           </a:xfrm>
           <a:prstGeom prst="rect">
             <a:avLst/>
@@ -6493,7 +6493,7 @@
                 </a:solidFill>
                 <a:latin typeface="Arial"/>
               </a:rPr>
-              <a:t>34 %</a:t>
+              <a:t>26 %</a:t>
             </a:r>
           </a:p>
         </p:txBody>
@@ -6506,8 +6506,8 @@
         </p:nvSpPr>
         <p:spPr>
           <a:xfrm>
-            <a:off x="10564368" y="4906060"/>
-            <a:ext cx="475488" cy="227990"/>
+            <a:off x="10564368" y="4798771"/>
+            <a:ext cx="475488" cy="107289"/>
           </a:xfrm>
           <a:prstGeom prst="rect">
             <a:avLst/>
@@ -6550,8 +6550,8 @@
         </p:nvSpPr>
         <p:spPr>
           <a:xfrm>
-            <a:off x="10564368" y="5134051"/>
-            <a:ext cx="475488" cy="268224"/>
+            <a:off x="10564368" y="4906060"/>
+            <a:ext cx="475488" cy="107289"/>
           </a:xfrm>
           <a:prstGeom prst="rect">
             <a:avLst/>
@@ -6594,8 +6594,8 @@
         </p:nvSpPr>
         <p:spPr>
           <a:xfrm>
-            <a:off x="10564368" y="5402275"/>
-            <a:ext cx="475488" cy="187756"/>
+            <a:off x="10564368" y="5013350"/>
+            <a:ext cx="475488" cy="335280"/>
           </a:xfrm>
           <a:prstGeom prst="rect">
             <a:avLst/>
@@ -6632,14 +6632,49 @@
       </p:sp>
       <p:sp>
         <p:nvSpPr>
-          <p:cNvPr id="91" name="Rectangle 90"/>
+          <p:cNvPr id="91" name="TextBox 90"/>
+          <p:cNvSpPr txBox="1"/>
+          <p:nvPr/>
+        </p:nvSpPr>
+        <p:spPr>
+          <a:xfrm>
+            <a:off x="10564368" y="5013350"/>
+            <a:ext cx="475488" cy="335280"/>
+          </a:xfrm>
+          <a:prstGeom prst="rect">
+            <a:avLst/>
+          </a:prstGeom>
+          <a:noFill/>
+        </p:spPr>
+        <p:txBody>
+          <a:bodyPr wrap="square" anchor="ctr" lIns="0" rIns="0" tIns="0" bIns="0">
+            <a:spAutoFit/>
+          </a:bodyPr>
+          <a:lstStyle/>
+          <a:p>
+            <a:pPr algn="ctr"/>
+            <a:r>
+              <a:rPr sz="1000" b="1" i="0">
+                <a:solidFill>
+                  <a:srgbClr val="FFFFFF"/>
+                </a:solidFill>
+                <a:latin typeface="Arial"/>
+              </a:rPr>
+              <a:t>25 %</a:t>
+            </a:r>
+          </a:p>
+        </p:txBody>
+      </p:sp>
+      <p:sp>
+        <p:nvSpPr>
+          <p:cNvPr id="92" name="Rectangle 91"/>
           <p:cNvSpPr/>
           <p:nvPr/>
         </p:nvSpPr>
         <p:spPr>
           <a:xfrm>
-            <a:off x="10564368" y="5590031"/>
-            <a:ext cx="475488" cy="147523"/>
+            <a:off x="10564368" y="5348630"/>
+            <a:ext cx="475488" cy="442569"/>
           </a:xfrm>
           <a:prstGeom prst="rect">
             <a:avLst/>
@@ -6676,14 +6711,49 @@
       </p:sp>
       <p:sp>
         <p:nvSpPr>
-          <p:cNvPr id="92" name="Rectangle 91"/>
+          <p:cNvPr id="93" name="TextBox 92"/>
+          <p:cNvSpPr txBox="1"/>
+          <p:nvPr/>
+        </p:nvSpPr>
+        <p:spPr>
+          <a:xfrm>
+            <a:off x="10564368" y="5348630"/>
+            <a:ext cx="475488" cy="442569"/>
+          </a:xfrm>
+          <a:prstGeom prst="rect">
+            <a:avLst/>
+          </a:prstGeom>
+          <a:noFill/>
+        </p:spPr>
+        <p:txBody>
+          <a:bodyPr wrap="square" anchor="ctr" lIns="0" rIns="0" tIns="0" bIns="0">
+            <a:spAutoFit/>
+          </a:bodyPr>
+          <a:lstStyle/>
+          <a:p>
+            <a:pPr algn="ctr"/>
+            <a:r>
+              <a:rPr sz="1000" b="1" i="0">
+                <a:solidFill>
+                  <a:srgbClr val="FFFFFF"/>
+                </a:solidFill>
+                <a:latin typeface="Arial"/>
+              </a:rPr>
+              <a:t>33 %</a:t>
+            </a:r>
+          </a:p>
+        </p:txBody>
+      </p:sp>
+      <p:sp>
+        <p:nvSpPr>
+          <p:cNvPr id="94" name="Rectangle 93"/>
           <p:cNvSpPr/>
           <p:nvPr/>
         </p:nvSpPr>
         <p:spPr>
           <a:xfrm>
-            <a:off x="10564368" y="5737555"/>
-            <a:ext cx="475488" cy="53644"/>
+            <a:off x="10564368" y="5791200"/>
+            <a:ext cx="475488" cy="0"/>
           </a:xfrm>
           <a:prstGeom prst="rect">
             <a:avLst/>
@@ -7119,7 +7189,7 @@
                 </a:solidFill>
                 <a:latin typeface="Arial"/>
               </a:rPr>
-              <a:t>Le départ en vacances concentre la demande</a:t>
+              <a:t>Les vols vers l'Afrique cliquent le mieux</a:t>
             </a:r>
           </a:p>
         </p:txBody>
@@ -7154,7 +7224,7 @@
                 </a:solidFill>
                 <a:latin typeface="Arial"/>
               </a:rPr>
-              <a:t>85,3 % des conversations sont déclenchées par un départ en vacances : billets d'avion, sac cabine, trousse de toilette.</a:t>
+              <a:t>Les vols Paris – Afrique et Maghreb atteignent 1,06 fois le CTR moyen, et Lyon – Abidjan 1,15 fois.</a:t>
             </a:r>
           </a:p>
         </p:txBody>
@@ -7189,7 +7259,7 @@
                 </a:solidFill>
                 <a:latin typeface="Arial"/>
               </a:rPr>
-              <a:t>→  Mettre en avant les vols vers les destinations des vacances de la Toussaint et de Noël.</a:t>
+              <a:t>→  Renforcer les liaisons vers l'Afrique et le Maghreb.</a:t>
             </a:r>
           </a:p>
         </p:txBody>
@@ -7305,7 +7375,7 @@
                 </a:solidFill>
                 <a:latin typeface="Arial"/>
               </a:rPr>
-              <a:t>Exister face aux compagnies et au train</a:t>
+              <a:t>Mettre en avant une destination plutôt qu'un prix</a:t>
             </a:r>
           </a:p>
         </p:txBody>
@@ -7340,7 +7410,7 @@
                 </a:solidFill>
                 <a:latin typeface="Arial"/>
               </a:rPr>
-              <a:t>Cdiscount Vols reste sous 0,1 % de part de voix (13e). La SNCF (31,7 %), easyJet et Transavia dominent. Côté ads : 6,1 %.</a:t>
+              <a:t>Les annonces « destinations tendances » atteignent 1,08 fois la moyenne. Les vols court-courriers vers l'Europe restent à 0,94 fois.</a:t>
             </a:r>
           </a:p>
         </p:txBody>
@@ -7375,7 +7445,7 @@
                 </a:solidFill>
                 <a:latin typeface="Arial"/>
               </a:rPr>
-              <a:t>→  Renforcer la présence ads sur les requêtes de comparaison de vols et de prix.</a:t>
+              <a:t>→  Associer chaque annonce à une destination qui fait envie.</a:t>
             </a:r>
           </a:p>
         </p:txBody>
@@ -7491,7 +7561,7 @@
                 </a:solidFill>
                 <a:latin typeface="Arial"/>
               </a:rPr>
-              <a:t>Un trafic multiplié par 5,5</a:t>
+              <a:t>Revoir l'Outre-mer</a:t>
             </a:r>
           </a:p>
         </p:txBody>
@@ -7526,7 +7596,7 @@
                 </a:solidFill>
                 <a:latin typeface="Arial"/>
               </a:rPr>
-              <a:t>Les clics passent de 1 694 à 9 406 (+455 %) et les impressions de 965 665 à 1 855 410 (+92 %). Le CTR passe de 0,18 % à 0,51 %.</a:t>
+              <a:t>Les vols vers les DOM-TOM restent à 0,58 fois la moyenne.</a:t>
             </a:r>
           </a:p>
         </p:txBody>
@@ -7561,7 +7631,7 @@
                 </a:solidFill>
                 <a:latin typeface="Arial"/>
               </a:rPr>
-              <a:t>→  Profiter de ce trafic pour pousser les offres les plus compétitives.</a:t>
+              <a:t>→  Tester des accroches vacances de fin d'année pour la Martinique et la Guadeloupe.</a:t>
             </a:r>
           </a:p>
         </p:txBody>
@@ -7712,7 +7782,7 @@
                 </a:solidFill>
                 <a:latin typeface="Arial"/>
               </a:rPr>
-              <a:t>Aucune conversion n'est remontée par Awin en septembre malgré 9 406 clics, ni depuis le lancement : l'objectif de ROI de 35 ne peut pas être mesuré.</a:t>
+              <a:t>Aucune conversion n'est remontée par Awin en septembre malgré 9 406 clics.</a:t>
             </a:r>
           </a:p>
         </p:txBody>

--- a/rapports/septembre/Cdiscount_Voyages_Vols_sept2026.pptx
+++ b/rapports/septembre/Cdiscount_Voyages_Vols_sept2026.pptx
@@ -5283,22 +5283,22 @@
               </a:spcAft>
             </a:pPr>
             <a:r>
+              <a:rPr sz="2000" b="1" i="0">
+                <a:solidFill>
+                  <a:srgbClr val="EE6A2C"/>
+                </a:solidFill>
+                <a:latin typeface="Arial"/>
+              </a:rPr>
+              <a:t>billet d'avion</a:t>
+            </a:r>
+            <a:r>
               <a:rPr sz="1800" b="1" i="0">
                 <a:solidFill>
-                  <a:srgbClr val="EE6A2C"/>
-                </a:solidFill>
-                <a:latin typeface="Arial"/>
-              </a:rPr>
-              <a:t>départ en vacances</a:t>
-            </a:r>
-            <a:r>
-              <a:rPr sz="1600" b="1" i="0">
-                <a:solidFill>
                   <a:srgbClr val="111111"/>
                 </a:solidFill>
                 <a:latin typeface="Arial"/>
               </a:rPr>
-              <a:t>   billets d'avion</a:t>
+              <a:t>   vol direct</a:t>
             </a:r>
           </a:p>
           <a:p>
@@ -5314,7 +5314,7 @@
                 </a:solidFill>
                 <a:latin typeface="Arial"/>
               </a:rPr>
-              <a:t>SNCF</a:t>
+              <a:t>Afrique</a:t>
             </a:r>
             <a:r>
               <a:rPr sz="1400" b="1" i="0">
@@ -5323,7 +5323,7 @@
                 </a:solidFill>
                 <a:latin typeface="Arial"/>
               </a:rPr>
-              <a:t>   easyJet</a:t>
+              <a:t>   Maghreb</a:t>
             </a:r>
           </a:p>
           <a:p>
@@ -5339,7 +5339,7 @@
                 </a:solidFill>
                 <a:latin typeface="Arial"/>
               </a:rPr>
-              <a:t>Transavia</a:t>
+              <a:t>Abidjan</a:t>
             </a:r>
             <a:r>
               <a:rPr sz="1200" b="0" i="0">
@@ -5348,7 +5348,16 @@
                 </a:solidFill>
                 <a:latin typeface="Arial"/>
               </a:rPr>
-              <a:t>   Ryanair</a:t>
+              <a:t>   Thaïlande</a:t>
+            </a:r>
+            <a:r>
+              <a:rPr sz="1200" b="1" i="0">
+                <a:solidFill>
+                  <a:srgbClr val="111111"/>
+                </a:solidFill>
+                <a:latin typeface="Arial"/>
+              </a:rPr>
+              <a:t>   Bali</a:t>
             </a:r>
           </a:p>
           <a:p>
@@ -5364,7 +5373,7 @@
                 </a:solidFill>
                 <a:latin typeface="Arial"/>
               </a:rPr>
-              <a:t>sac cabine</a:t>
+              <a:t>Martinique</a:t>
             </a:r>
             <a:r>
               <a:rPr sz="1100" b="1" i="0">
@@ -5373,7 +5382,16 @@
                 </a:solidFill>
                 <a:latin typeface="Arial"/>
               </a:rPr>
-              <a:t>   Air France</a:t>
+              <a:t>   Guadeloupe</a:t>
+            </a:r>
+            <a:r>
+              <a:rPr sz="1100" b="0" i="0">
+                <a:solidFill>
+                  <a:srgbClr val="555B66"/>
+                </a:solidFill>
+                <a:latin typeface="Arial"/>
+              </a:rPr>
+              <a:t>   Lanzarote</a:t>
             </a:r>
           </a:p>
           <a:p>
@@ -5389,7 +5407,7 @@
                 </a:solidFill>
                 <a:latin typeface="Arial"/>
               </a:rPr>
-              <a:t>trousse de toilette</a:t>
+              <a:t>paiement en 4 fois</a:t>
             </a:r>
             <a:r>
               <a:rPr sz="1100" b="0" i="0">
@@ -5398,7 +5416,16 @@
                 </a:solidFill>
                 <a:latin typeface="Arial"/>
               </a:rPr>
-              <a:t>   Volotea</a:t>
+              <a:t>   prix bas</a:t>
+            </a:r>
+            <a:r>
+              <a:rPr sz="1100" b="1" i="0">
+                <a:solidFill>
+                  <a:srgbClr val="EE6A2C"/>
+                </a:solidFill>
+                <a:latin typeface="Arial"/>
+              </a:rPr>
+              <a:t>   Lyon</a:t>
             </a:r>
           </a:p>
           <a:p>
@@ -5414,7 +5441,7 @@
                 </a:solidFill>
                 <a:latin typeface="Arial"/>
               </a:rPr>
-              <a:t>Skyscanner</a:t>
+              <a:t>Nice</a:t>
             </a:r>
             <a:r>
               <a:rPr sz="1100" b="0" i="0">
@@ -5423,7 +5450,16 @@
                 </a:solidFill>
                 <a:latin typeface="Arial"/>
               </a:rPr>
-              <a:t>   Kayak</a:t>
+              <a:t>   Marseille</a:t>
+            </a:r>
+            <a:r>
+              <a:rPr sz="1100" b="1" i="0">
+                <a:solidFill>
+                  <a:srgbClr val="EE6A2C"/>
+                </a:solidFill>
+                <a:latin typeface="Arial"/>
+              </a:rPr>
+              <a:t>   Islande</a:t>
             </a:r>
           </a:p>
         </p:txBody>
@@ -5607,7 +5643,7 @@
                 </a:solidFill>
                 <a:latin typeface="Arial"/>
               </a:rPr>
-              <a:t>Comment choisir un sac cabine conforme aux dimensions des compagnies ?</a:t>
+              <a:t>Quels vols au départ de Marseille vers Abidjan ?</a:t>
             </a:r>
           </a:p>
         </p:txBody>
@@ -5721,7 +5757,7 @@
                 </a:solidFill>
                 <a:latin typeface="Arial"/>
               </a:rPr>
-              <a:t>Comment organiser une trousse de toilette conforme aux règles de sécurité ?</a:t>
+              <a:t>Existe-t-il un vol direct entre Paris et Fort-de-France ?</a:t>
             </a:r>
           </a:p>
         </p:txBody>
@@ -5835,14 +5871,242 @@
                 </a:solidFill>
                 <a:latin typeface="Arial"/>
               </a:rPr>
-              <a:t>Montre-moi des sacoches Faraday disponibles.</a:t>
-            </a:r>
-          </a:p>
-        </p:txBody>
-      </p:sp>
-      <p:sp>
-        <p:nvSpPr>
-          <p:cNvPr id="71" name="TextBox 70"/>
+              <a:t>Quel vol direct choisir entre Paris et Lisbonne ?</a:t>
+            </a:r>
+          </a:p>
+        </p:txBody>
+      </p:sp>
+      <p:sp>
+        <p:nvSpPr>
+          <p:cNvPr id="71" name="Rectangle 70"/>
+          <p:cNvSpPr/>
+          <p:nvPr/>
+        </p:nvSpPr>
+        <p:spPr>
+          <a:xfrm>
+            <a:off x="4437888" y="5364480"/>
+            <a:ext cx="2913888" cy="304800"/>
+          </a:xfrm>
+          <a:prstGeom prst="rect">
+            <a:avLst/>
+          </a:prstGeom>
+          <a:solidFill>
+            <a:srgbClr val="F1EFEA"/>
+          </a:solidFill>
+          <a:ln>
+            <a:noFill/>
+          </a:ln>
+          <a:effectLst/>
+        </p:spPr>
+        <p:style>
+          <a:lnRef idx="1">
+            <a:schemeClr val="accent1"/>
+          </a:lnRef>
+          <a:fillRef idx="3">
+            <a:schemeClr val="accent1"/>
+          </a:fillRef>
+          <a:effectRef idx="2">
+            <a:schemeClr val="accent1"/>
+          </a:effectRef>
+          <a:fontRef idx="minor">
+            <a:schemeClr val="lt1"/>
+          </a:fontRef>
+        </p:style>
+        <p:txBody>
+          <a:bodyPr rtlCol="0" anchor="ctr"/>
+          <a:lstStyle/>
+          <a:p>
+            <a:pPr algn="ctr"/>
+          </a:p>
+        </p:txBody>
+      </p:sp>
+      <p:sp>
+        <p:nvSpPr>
+          <p:cNvPr id="72" name="TextBox 71"/>
+          <p:cNvSpPr txBox="1"/>
+          <p:nvPr/>
+        </p:nvSpPr>
+        <p:spPr>
+          <a:xfrm>
+            <a:off x="4559808" y="5364480"/>
+            <a:ext cx="182880" cy="304800"/>
+          </a:xfrm>
+          <a:prstGeom prst="rect">
+            <a:avLst/>
+          </a:prstGeom>
+          <a:noFill/>
+        </p:spPr>
+        <p:txBody>
+          <a:bodyPr wrap="square" anchor="ctr" lIns="0" rIns="0" tIns="0" bIns="0">
+            <a:spAutoFit/>
+          </a:bodyPr>
+          <a:lstStyle/>
+          <a:p>
+            <a:pPr algn="l"/>
+            <a:r>
+              <a:rPr sz="900" b="0" i="0">
+                <a:solidFill>
+                  <a:srgbClr val="555B66"/>
+                </a:solidFill>
+                <a:latin typeface="Arial"/>
+              </a:rPr>
+              <a:t>🔍</a:t>
+            </a:r>
+          </a:p>
+        </p:txBody>
+      </p:sp>
+      <p:sp>
+        <p:nvSpPr>
+          <p:cNvPr id="73" name="TextBox 72"/>
+          <p:cNvSpPr txBox="1"/>
+          <p:nvPr/>
+        </p:nvSpPr>
+        <p:spPr>
+          <a:xfrm>
+            <a:off x="4791456" y="5364480"/>
+            <a:ext cx="2499360" cy="304800"/>
+          </a:xfrm>
+          <a:prstGeom prst="rect">
+            <a:avLst/>
+          </a:prstGeom>
+          <a:noFill/>
+        </p:spPr>
+        <p:txBody>
+          <a:bodyPr wrap="square" anchor="ctr" lIns="0" rIns="0" tIns="0" bIns="0">
+            <a:spAutoFit/>
+          </a:bodyPr>
+          <a:lstStyle/>
+          <a:p>
+            <a:pPr algn="l"/>
+            <a:r>
+              <a:rPr sz="900" b="0" i="0">
+                <a:solidFill>
+                  <a:srgbClr val="111111"/>
+                </a:solidFill>
+                <a:latin typeface="Arial"/>
+              </a:rPr>
+              <a:t>Où trouver un aller-retour Paris – Nice à un bon prix ?</a:t>
+            </a:r>
+          </a:p>
+        </p:txBody>
+      </p:sp>
+      <p:sp>
+        <p:nvSpPr>
+          <p:cNvPr id="74" name="Rectangle 73"/>
+          <p:cNvSpPr/>
+          <p:nvPr/>
+        </p:nvSpPr>
+        <p:spPr>
+          <a:xfrm>
+            <a:off x="4437888" y="5730240"/>
+            <a:ext cx="2913888" cy="304800"/>
+          </a:xfrm>
+          <a:prstGeom prst="rect">
+            <a:avLst/>
+          </a:prstGeom>
+          <a:solidFill>
+            <a:srgbClr val="F1EFEA"/>
+          </a:solidFill>
+          <a:ln>
+            <a:noFill/>
+          </a:ln>
+          <a:effectLst/>
+        </p:spPr>
+        <p:style>
+          <a:lnRef idx="1">
+            <a:schemeClr val="accent1"/>
+          </a:lnRef>
+          <a:fillRef idx="3">
+            <a:schemeClr val="accent1"/>
+          </a:fillRef>
+          <a:effectRef idx="2">
+            <a:schemeClr val="accent1"/>
+          </a:effectRef>
+          <a:fontRef idx="minor">
+            <a:schemeClr val="lt1"/>
+          </a:fontRef>
+        </p:style>
+        <p:txBody>
+          <a:bodyPr rtlCol="0" anchor="ctr"/>
+          <a:lstStyle/>
+          <a:p>
+            <a:pPr algn="ctr"/>
+          </a:p>
+        </p:txBody>
+      </p:sp>
+      <p:sp>
+        <p:nvSpPr>
+          <p:cNvPr id="75" name="TextBox 74"/>
+          <p:cNvSpPr txBox="1"/>
+          <p:nvPr/>
+        </p:nvSpPr>
+        <p:spPr>
+          <a:xfrm>
+            <a:off x="4559808" y="5730240"/>
+            <a:ext cx="182880" cy="304800"/>
+          </a:xfrm>
+          <a:prstGeom prst="rect">
+            <a:avLst/>
+          </a:prstGeom>
+          <a:noFill/>
+        </p:spPr>
+        <p:txBody>
+          <a:bodyPr wrap="square" anchor="ctr" lIns="0" rIns="0" tIns="0" bIns="0">
+            <a:spAutoFit/>
+          </a:bodyPr>
+          <a:lstStyle/>
+          <a:p>
+            <a:pPr algn="l"/>
+            <a:r>
+              <a:rPr sz="900" b="0" i="0">
+                <a:solidFill>
+                  <a:srgbClr val="555B66"/>
+                </a:solidFill>
+                <a:latin typeface="Arial"/>
+              </a:rPr>
+              <a:t>🔍</a:t>
+            </a:r>
+          </a:p>
+        </p:txBody>
+      </p:sp>
+      <p:sp>
+        <p:nvSpPr>
+          <p:cNvPr id="76" name="TextBox 75"/>
+          <p:cNvSpPr txBox="1"/>
+          <p:nvPr/>
+        </p:nvSpPr>
+        <p:spPr>
+          <a:xfrm>
+            <a:off x="4791456" y="5730240"/>
+            <a:ext cx="2499360" cy="304800"/>
+          </a:xfrm>
+          <a:prstGeom prst="rect">
+            <a:avLst/>
+          </a:prstGeom>
+          <a:noFill/>
+        </p:spPr>
+        <p:txBody>
+          <a:bodyPr wrap="square" anchor="ctr" lIns="0" rIns="0" tIns="0" bIns="0">
+            <a:spAutoFit/>
+          </a:bodyPr>
+          <a:lstStyle/>
+          <a:p>
+            <a:pPr algn="l"/>
+            <a:r>
+              <a:rPr sz="900" b="0" i="0">
+                <a:solidFill>
+                  <a:srgbClr val="111111"/>
+                </a:solidFill>
+                <a:latin typeface="Arial"/>
+              </a:rPr>
+              <a:t>Quelle destination pour un week-end en Europe ?</a:t>
+            </a:r>
+          </a:p>
+        </p:txBody>
+      </p:sp>
+      <p:sp>
+        <p:nvSpPr>
+          <p:cNvPr id="77" name="TextBox 76"/>
           <p:cNvSpPr txBox="1"/>
           <p:nvPr/>
         </p:nvSpPr>
@@ -5877,7 +6141,7 @@
       </p:sp>
       <p:sp>
         <p:nvSpPr>
-          <p:cNvPr id="72" name="TextBox 71"/>
+          <p:cNvPr id="78" name="TextBox 77"/>
           <p:cNvSpPr txBox="1"/>
           <p:nvPr/>
         </p:nvSpPr>
@@ -5912,7 +6176,7 @@
       </p:sp>
       <p:sp>
         <p:nvSpPr>
-          <p:cNvPr id="73" name="TextBox 72"/>
+          <p:cNvPr id="79" name="TextBox 78"/>
           <p:cNvSpPr txBox="1"/>
           <p:nvPr/>
         </p:nvSpPr>
@@ -5947,7 +6211,7 @@
       </p:sp>
       <p:sp>
         <p:nvSpPr>
-          <p:cNvPr id="74" name="Rectangle 73"/>
+          <p:cNvPr id="80" name="Rectangle 79"/>
           <p:cNvSpPr/>
           <p:nvPr/>
         </p:nvSpPr>
@@ -5991,7 +6255,7 @@
       </p:sp>
       <p:sp>
         <p:nvSpPr>
-          <p:cNvPr id="75" name="TextBox 74"/>
+          <p:cNvPr id="81" name="TextBox 80"/>
           <p:cNvSpPr txBox="1"/>
           <p:nvPr/>
         </p:nvSpPr>
@@ -6026,7 +6290,7 @@
       </p:sp>
       <p:sp>
         <p:nvSpPr>
-          <p:cNvPr id="76" name="Rectangle 75"/>
+          <p:cNvPr id="82" name="Rectangle 81"/>
           <p:cNvSpPr/>
           <p:nvPr/>
         </p:nvSpPr>
@@ -6070,7 +6334,7 @@
       </p:sp>
       <p:sp>
         <p:nvSpPr>
-          <p:cNvPr id="77" name="TextBox 76"/>
+          <p:cNvPr id="83" name="TextBox 82"/>
           <p:cNvSpPr txBox="1"/>
           <p:nvPr/>
         </p:nvSpPr>
@@ -6105,7 +6369,7 @@
       </p:sp>
       <p:sp>
         <p:nvSpPr>
-          <p:cNvPr id="78" name="Rectangle 77"/>
+          <p:cNvPr id="84" name="Rectangle 83"/>
           <p:cNvSpPr/>
           <p:nvPr/>
         </p:nvSpPr>
@@ -6149,7 +6413,7 @@
       </p:sp>
       <p:sp>
         <p:nvSpPr>
-          <p:cNvPr id="79" name="TextBox 78"/>
+          <p:cNvPr id="85" name="TextBox 84"/>
           <p:cNvSpPr txBox="1"/>
           <p:nvPr/>
         </p:nvSpPr>
@@ -6184,7 +6448,7 @@
       </p:sp>
       <p:sp>
         <p:nvSpPr>
-          <p:cNvPr id="80" name="Rectangle 79"/>
+          <p:cNvPr id="86" name="Rectangle 85"/>
           <p:cNvSpPr/>
           <p:nvPr/>
         </p:nvSpPr>
@@ -6228,7 +6492,7 @@
       </p:sp>
       <p:sp>
         <p:nvSpPr>
-          <p:cNvPr id="81" name="TextBox 80"/>
+          <p:cNvPr id="87" name="TextBox 86"/>
           <p:cNvSpPr txBox="1"/>
           <p:nvPr/>
         </p:nvSpPr>
@@ -6263,7 +6527,7 @@
       </p:sp>
       <p:sp>
         <p:nvSpPr>
-          <p:cNvPr id="82" name="Rectangle 81"/>
+          <p:cNvPr id="88" name="Rectangle 87"/>
           <p:cNvSpPr/>
           <p:nvPr/>
         </p:nvSpPr>
@@ -6307,7 +6571,7 @@
       </p:sp>
       <p:sp>
         <p:nvSpPr>
-          <p:cNvPr id="83" name="TextBox 82"/>
+          <p:cNvPr id="89" name="TextBox 88"/>
           <p:cNvSpPr txBox="1"/>
           <p:nvPr/>
         </p:nvSpPr>
@@ -6342,7 +6606,7 @@
       </p:sp>
       <p:sp>
         <p:nvSpPr>
-          <p:cNvPr id="84" name="Rectangle 83"/>
+          <p:cNvPr id="90" name="Rectangle 89"/>
           <p:cNvSpPr/>
           <p:nvPr/>
         </p:nvSpPr>
@@ -6386,7 +6650,7 @@
       </p:sp>
       <p:sp>
         <p:nvSpPr>
-          <p:cNvPr id="85" name="TextBox 84"/>
+          <p:cNvPr id="91" name="TextBox 90"/>
           <p:cNvSpPr txBox="1"/>
           <p:nvPr/>
         </p:nvSpPr>
@@ -6421,7 +6685,7 @@
       </p:sp>
       <p:sp>
         <p:nvSpPr>
-          <p:cNvPr id="86" name="Rectangle 85"/>
+          <p:cNvPr id="92" name="Rectangle 91"/>
           <p:cNvSpPr/>
           <p:nvPr/>
         </p:nvSpPr>
@@ -6465,7 +6729,7 @@
       </p:sp>
       <p:sp>
         <p:nvSpPr>
-          <p:cNvPr id="87" name="TextBox 86"/>
+          <p:cNvPr id="93" name="TextBox 92"/>
           <p:cNvSpPr txBox="1"/>
           <p:nvPr/>
         </p:nvSpPr>
@@ -6500,7 +6764,7 @@
       </p:sp>
       <p:sp>
         <p:nvSpPr>
-          <p:cNvPr id="88" name="Rectangle 87"/>
+          <p:cNvPr id="94" name="Rectangle 93"/>
           <p:cNvSpPr/>
           <p:nvPr/>
         </p:nvSpPr>
@@ -6544,7 +6808,7 @@
       </p:sp>
       <p:sp>
         <p:nvSpPr>
-          <p:cNvPr id="89" name="Rectangle 88"/>
+          <p:cNvPr id="95" name="Rectangle 94"/>
           <p:cNvSpPr/>
           <p:nvPr/>
         </p:nvSpPr>
@@ -6588,7 +6852,7 @@
       </p:sp>
       <p:sp>
         <p:nvSpPr>
-          <p:cNvPr id="90" name="Rectangle 89"/>
+          <p:cNvPr id="96" name="Rectangle 95"/>
           <p:cNvSpPr/>
           <p:nvPr/>
         </p:nvSpPr>
@@ -6632,7 +6896,7 @@
       </p:sp>
       <p:sp>
         <p:nvSpPr>
-          <p:cNvPr id="91" name="TextBox 90"/>
+          <p:cNvPr id="97" name="TextBox 96"/>
           <p:cNvSpPr txBox="1"/>
           <p:nvPr/>
         </p:nvSpPr>
@@ -6667,7 +6931,7 @@
       </p:sp>
       <p:sp>
         <p:nvSpPr>
-          <p:cNvPr id="92" name="Rectangle 91"/>
+          <p:cNvPr id="98" name="Rectangle 97"/>
           <p:cNvSpPr/>
           <p:nvPr/>
         </p:nvSpPr>
@@ -6711,7 +6975,7 @@
       </p:sp>
       <p:sp>
         <p:nvSpPr>
-          <p:cNvPr id="93" name="TextBox 92"/>
+          <p:cNvPr id="99" name="TextBox 98"/>
           <p:cNvSpPr txBox="1"/>
           <p:nvPr/>
         </p:nvSpPr>
@@ -6746,7 +7010,7 @@
       </p:sp>
       <p:sp>
         <p:nvSpPr>
-          <p:cNvPr id="94" name="Rectangle 93"/>
+          <p:cNvPr id="100" name="Rectangle 99"/>
           <p:cNvSpPr/>
           <p:nvPr/>
         </p:nvSpPr>
